--- a/content/Lectures/Semester 2/Week 01 - Introduction to Simulation/5 Source Files/Introduction to Simulation.pptx
+++ b/content/Lectures/Semester 2/Week 01 - Introduction to Simulation/5 Source Files/Introduction to Simulation.pptx
@@ -25668,7 +25668,7 @@
                         <a:rPr lang="en-GB" sz="1100" u="none" strike="noStrike" dirty="0">
                           <a:effectLst/>
                         </a:rPr>
-                        <a:t>0.2-0.4</a:t>
+                        <a:t>0.2-0.6</a:t>
                       </a:r>
                       <a:endParaRPr lang="en-GB" sz="1100" b="0" i="0" u="none" strike="noStrike" dirty="0">
                         <a:solidFill>
